--- a/dist/pptx/Glauca-Dark.pptx
+++ b/dist/pptx/Glauca-Dark.pptx
@@ -4576,7 +4576,7 @@
                 </a:solidFill>
                 <a:latin typeface="IBM Plex Sans"/>
               </a:rPr>
-              <a:t>Fire stays rare on every surface: slides, posters, and web. Only the code tier spends it freely, where colour-blind safety puts the blue on keywords.</a:t>
+              <a:t>Sky-blue stays rare on every surface: slides, posters, and web. Only the code tier spends it freely, where colour-blind safety puts the blue on keywords.</a:t>
             </a:r>
           </a:p>
         </p:txBody>
